--- a/Slide_Presentasi_AI_Agent_UGM.pptx
+++ b/Slide_Presentasi_AI_Agent_UGM.pptx
@@ -18629,7 +18629,7 @@
         </p:blipFill>
         <p:spPr>
           <a:xfrm>
-            <a:off x="7875422" y="2115737"/>
+            <a:off x="7875422" y="1944287"/>
             <a:ext cx="9993327" cy="5830860"/>
           </a:xfrm>
           <a:prstGeom prst="rect">
@@ -18674,7 +18674,7 @@
                 <a:ea typeface="Plus Jakarta Sans" pitchFamily="34" charset="-122"/>
                 <a:cs typeface="Gama-Sans light" panose="00000800000000000000" charset="0"/>
               </a:rPr>
-              <a:t>Competitor Radar adalah sistem intelijen kompetitor berbasis Agentic AI, untuk pemilik atau pengelola UMKM berbasis lokasi — coffee shop, restoran, salon, bengkel, dan klinik.</a:t>
+              <a:t>Competitor Radar adalah Sistem Analisis Kompetitor dan Rekomendasi Strategi bagi UMKM Berbasis Agentic AI, untuk pemilik atau pengelola UMKM berbasis lokasi — coffee shop, restoran, salon, bengkel, dan klinik.</a:t>
             </a:r>
             <a:endParaRPr lang="en-US" sz="2800" dirty="0">
               <a:solidFill>
